--- a/4 - NSparkAvancé - Spark Shell.pptx
+++ b/4 - NSparkAvancé - Spark Shell.pptx
@@ -18549,7 +18549,7 @@
         <p:spPr>
           <a:xfrm>
             <a:off x="702127" y="1048864"/>
-            <a:ext cx="7943850" cy="1159292"/>
+            <a:ext cx="7943850" cy="2482731"/>
           </a:xfrm>
           <a:prstGeom prst="rect">
             <a:avLst/>
@@ -18587,6 +18587,73 @@
                 <a:spcPts val="800"/>
               </a:spcAft>
             </a:pPr>
+            <a:endParaRPr lang="fr-FR" sz="1200" dirty="0">
+              <a:ea typeface="Calibri" panose="020F0502020204030204" pitchFamily="34" charset="0"/>
+              <a:cs typeface="Arial" panose="020B0604020202020204" pitchFamily="34" charset="0"/>
+            </a:endParaRPr>
+          </a:p>
+          <a:p>
+            <a:pPr algn="just">
+              <a:spcBef>
+                <a:spcPts val="1200"/>
+              </a:spcBef>
+              <a:spcAft>
+                <a:spcPts val="800"/>
+              </a:spcAft>
+            </a:pPr>
+            <a:endParaRPr lang="fr-FR" sz="1200" dirty="0">
+              <a:ea typeface="Calibri" panose="020F0502020204030204" pitchFamily="34" charset="0"/>
+              <a:cs typeface="Arial" panose="020B0604020202020204" pitchFamily="34" charset="0"/>
+            </a:endParaRPr>
+          </a:p>
+          <a:p>
+            <a:pPr algn="just">
+              <a:spcBef>
+                <a:spcPts val="1200"/>
+              </a:spcBef>
+              <a:spcAft>
+                <a:spcPts val="800"/>
+              </a:spcAft>
+            </a:pPr>
+            <a:endParaRPr lang="fr-FR" sz="1200" dirty="0">
+              <a:ea typeface="Calibri" panose="020F0502020204030204" pitchFamily="34" charset="0"/>
+              <a:cs typeface="Arial" panose="020B0604020202020204" pitchFamily="34" charset="0"/>
+            </a:endParaRPr>
+          </a:p>
+          <a:p>
+            <a:pPr algn="just">
+              <a:spcBef>
+                <a:spcPts val="1200"/>
+              </a:spcBef>
+              <a:spcAft>
+                <a:spcPts val="800"/>
+              </a:spcAft>
+            </a:pPr>
+            <a:r>
+              <a:rPr lang="fr-FR" sz="1200" dirty="0">
+                <a:ea typeface="Calibri" panose="020F0502020204030204" pitchFamily="34" charset="0"/>
+                <a:cs typeface="Arial" panose="020B0604020202020204" pitchFamily="34" charset="0"/>
+              </a:rPr>
+              <a:t>Optimisation avec le Broadcast </a:t>
+            </a:r>
+            <a:r>
+              <a:rPr lang="fr-FR" sz="1200" dirty="0" err="1">
+                <a:ea typeface="Calibri" panose="020F0502020204030204" pitchFamily="34" charset="0"/>
+                <a:cs typeface="Arial" panose="020B0604020202020204" pitchFamily="34" charset="0"/>
+              </a:rPr>
+              <a:t>join</a:t>
+            </a:r>
+            <a:r>
+              <a:rPr lang="fr-FR" sz="1200" dirty="0">
+                <a:ea typeface="Calibri" panose="020F0502020204030204" pitchFamily="34" charset="0"/>
+                <a:cs typeface="Arial" panose="020B0604020202020204" pitchFamily="34" charset="0"/>
+              </a:rPr>
+              <a:t> (</a:t>
+            </a:r>
+            <a:r>
+              <a:rPr lang="fr-FR" sz="1200" dirty="0"/>
+              <a:t>Spark envoie une copie de la petite table à chaque exécuteur).</a:t>
+            </a:r>
             <a:endParaRPr lang="fr-FR" sz="1200" dirty="0">
               <a:ea typeface="Calibri" panose="020F0502020204030204" pitchFamily="34" charset="0"/>
               <a:cs typeface="Arial" panose="020B0604020202020204" pitchFamily="34" charset="0"/>
@@ -18898,7 +18965,7 @@
         </p:nvSpPr>
         <p:spPr>
           <a:xfrm>
-            <a:off x="824975" y="1743316"/>
+            <a:off x="824975" y="1318773"/>
             <a:ext cx="3369610" cy="1192029"/>
           </a:xfrm>
           <a:prstGeom prst="rect">
@@ -19059,7 +19126,7 @@
         </p:nvSpPr>
         <p:spPr>
           <a:xfrm>
-            <a:off x="4822818" y="1743315"/>
+            <a:off x="4822818" y="1379721"/>
             <a:ext cx="3369610" cy="1192029"/>
           </a:xfrm>
           <a:prstGeom prst="rect">
@@ -19203,6 +19270,326 @@
               </a:rPr>
               <a:t>     .show()</a:t>
             </a:r>
+          </a:p>
+        </p:txBody>
+      </p:sp>
+      <p:sp>
+        <p:nvSpPr>
+          <p:cNvPr id="3" name="Rectangle 2">
+            <a:extLst>
+              <a:ext uri="{FF2B5EF4-FFF2-40B4-BE49-F238E27FC236}">
+                <a16:creationId xmlns:a16="http://schemas.microsoft.com/office/drawing/2014/main" id="{C14F6F81-1CA7-C236-C34B-2F2874C3154B}"/>
+              </a:ext>
+            </a:extLst>
+          </p:cNvPr>
+          <p:cNvSpPr/>
+          <p:nvPr/>
+        </p:nvSpPr>
+        <p:spPr>
+          <a:xfrm>
+            <a:off x="4822818" y="3305906"/>
+            <a:ext cx="3369610" cy="1192029"/>
+          </a:xfrm>
+          <a:prstGeom prst="rect">
+            <a:avLst/>
+          </a:prstGeom>
+        </p:spPr>
+        <p:style>
+          <a:lnRef idx="2">
+            <a:schemeClr val="dk1">
+              <a:shade val="15000"/>
+            </a:schemeClr>
+          </a:lnRef>
+          <a:fillRef idx="1">
+            <a:schemeClr val="dk1"/>
+          </a:fillRef>
+          <a:effectRef idx="0">
+            <a:schemeClr val="dk1"/>
+          </a:effectRef>
+          <a:fontRef idx="minor">
+            <a:schemeClr val="lt1"/>
+          </a:fontRef>
+        </p:style>
+        <p:txBody>
+          <a:bodyPr rtlCol="0" anchor="ctr"/>
+          <a:lstStyle/>
+          <a:p>
+            <a:r>
+              <a:rPr lang="en-US" sz="1000" dirty="0">
+                <a:latin typeface="Aptos" panose="020B0004020202020204" pitchFamily="34" charset="0"/>
+                <a:ea typeface="DengXian" panose="02010600030101010101" pitchFamily="2" charset="-122"/>
+                <a:cs typeface="Aptos" panose="020B0004020202020204" pitchFamily="34" charset="0"/>
+              </a:rPr>
+              <a:t>from </a:t>
+            </a:r>
+            <a:r>
+              <a:rPr lang="en-US" sz="1000" dirty="0" err="1">
+                <a:latin typeface="Aptos" panose="020B0004020202020204" pitchFamily="34" charset="0"/>
+                <a:ea typeface="DengXian" panose="02010600030101010101" pitchFamily="2" charset="-122"/>
+                <a:cs typeface="Aptos" panose="020B0004020202020204" pitchFamily="34" charset="0"/>
+              </a:rPr>
+              <a:t>pyspark.sql.functions</a:t>
+            </a:r>
+            <a:r>
+              <a:rPr lang="en-US" sz="1000" dirty="0">
+                <a:latin typeface="Aptos" panose="020B0004020202020204" pitchFamily="34" charset="0"/>
+                <a:ea typeface="DengXian" panose="02010600030101010101" pitchFamily="2" charset="-122"/>
+                <a:cs typeface="Aptos" panose="020B0004020202020204" pitchFamily="34" charset="0"/>
+              </a:rPr>
+              <a:t> import broadcast</a:t>
+            </a:r>
+          </a:p>
+          <a:p>
+            <a:endParaRPr lang="en-US" sz="1000" dirty="0">
+              <a:latin typeface="Aptos" panose="020B0004020202020204" pitchFamily="34" charset="0"/>
+              <a:ea typeface="DengXian" panose="02010600030101010101" pitchFamily="2" charset="-122"/>
+              <a:cs typeface="Aptos" panose="020B0004020202020204" pitchFamily="34" charset="0"/>
+            </a:endParaRPr>
+          </a:p>
+          <a:p>
+            <a:r>
+              <a:rPr lang="en-US" sz="1000" dirty="0" err="1">
+                <a:latin typeface="Aptos" panose="020B0004020202020204" pitchFamily="34" charset="0"/>
+                <a:ea typeface="DengXian" panose="02010600030101010101" pitchFamily="2" charset="-122"/>
+                <a:cs typeface="Aptos" panose="020B0004020202020204" pitchFamily="34" charset="0"/>
+              </a:rPr>
+              <a:t>resultat</a:t>
+            </a:r>
+            <a:r>
+              <a:rPr lang="en-US" sz="1000" dirty="0">
+                <a:latin typeface="Aptos" panose="020B0004020202020204" pitchFamily="34" charset="0"/>
+                <a:ea typeface="DengXian" panose="02010600030101010101" pitchFamily="2" charset="-122"/>
+                <a:cs typeface="Aptos" panose="020B0004020202020204" pitchFamily="34" charset="0"/>
+              </a:rPr>
+              <a:t> = </a:t>
+            </a:r>
+            <a:r>
+              <a:rPr lang="en-US" sz="1000" dirty="0" err="1">
+                <a:latin typeface="Aptos" panose="020B0004020202020204" pitchFamily="34" charset="0"/>
+                <a:ea typeface="DengXian" panose="02010600030101010101" pitchFamily="2" charset="-122"/>
+                <a:cs typeface="Aptos" panose="020B0004020202020204" pitchFamily="34" charset="0"/>
+              </a:rPr>
+              <a:t>grande_table.join</a:t>
+            </a:r>
+            <a:r>
+              <a:rPr lang="en-US" sz="1000" dirty="0">
+                <a:latin typeface="Aptos" panose="020B0004020202020204" pitchFamily="34" charset="0"/>
+                <a:ea typeface="DengXian" panose="02010600030101010101" pitchFamily="2" charset="-122"/>
+                <a:cs typeface="Aptos" panose="020B0004020202020204" pitchFamily="34" charset="0"/>
+              </a:rPr>
+              <a:t>(</a:t>
+            </a:r>
+          </a:p>
+          <a:p>
+            <a:r>
+              <a:rPr lang="en-US" sz="1000" dirty="0">
+                <a:latin typeface="Aptos" panose="020B0004020202020204" pitchFamily="34" charset="0"/>
+                <a:ea typeface="DengXian" panose="02010600030101010101" pitchFamily="2" charset="-122"/>
+                <a:cs typeface="Aptos" panose="020B0004020202020204" pitchFamily="34" charset="0"/>
+              </a:rPr>
+              <a:t>    broadcast(</a:t>
+            </a:r>
+            <a:r>
+              <a:rPr lang="en-US" sz="1000" dirty="0" err="1">
+                <a:latin typeface="Aptos" panose="020B0004020202020204" pitchFamily="34" charset="0"/>
+                <a:ea typeface="DengXian" panose="02010600030101010101" pitchFamily="2" charset="-122"/>
+                <a:cs typeface="Aptos" panose="020B0004020202020204" pitchFamily="34" charset="0"/>
+              </a:rPr>
+              <a:t>petite_table</a:t>
+            </a:r>
+            <a:r>
+              <a:rPr lang="en-US" sz="1000" dirty="0">
+                <a:latin typeface="Aptos" panose="020B0004020202020204" pitchFamily="34" charset="0"/>
+                <a:ea typeface="DengXian" panose="02010600030101010101" pitchFamily="2" charset="-122"/>
+                <a:cs typeface="Aptos" panose="020B0004020202020204" pitchFamily="34" charset="0"/>
+              </a:rPr>
+              <a:t>),</a:t>
+            </a:r>
+          </a:p>
+          <a:p>
+            <a:r>
+              <a:rPr lang="en-US" sz="1000" dirty="0">
+                <a:latin typeface="Aptos" panose="020B0004020202020204" pitchFamily="34" charset="0"/>
+                <a:ea typeface="DengXian" panose="02010600030101010101" pitchFamily="2" charset="-122"/>
+                <a:cs typeface="Aptos" panose="020B0004020202020204" pitchFamily="34" charset="0"/>
+              </a:rPr>
+              <a:t>    on="id",</a:t>
+            </a:r>
+          </a:p>
+          <a:p>
+            <a:r>
+              <a:rPr lang="en-US" sz="1000" dirty="0">
+                <a:latin typeface="Aptos" panose="020B0004020202020204" pitchFamily="34" charset="0"/>
+                <a:ea typeface="DengXian" panose="02010600030101010101" pitchFamily="2" charset="-122"/>
+                <a:cs typeface="Aptos" panose="020B0004020202020204" pitchFamily="34" charset="0"/>
+              </a:rPr>
+              <a:t>    how="inner"</a:t>
+            </a:r>
+          </a:p>
+          <a:p>
+            <a:r>
+              <a:rPr lang="en-US" sz="1000" dirty="0">
+                <a:latin typeface="Aptos" panose="020B0004020202020204" pitchFamily="34" charset="0"/>
+                <a:ea typeface="DengXian" panose="02010600030101010101" pitchFamily="2" charset="-122"/>
+                <a:cs typeface="Aptos" panose="020B0004020202020204" pitchFamily="34" charset="0"/>
+              </a:rPr>
+              <a:t>)</a:t>
+            </a:r>
+            <a:endParaRPr lang="fr-FR" sz="1000" dirty="0">
+              <a:latin typeface="Aptos" panose="020B0004020202020204" pitchFamily="34" charset="0"/>
+              <a:ea typeface="DengXian" panose="02010600030101010101" pitchFamily="2" charset="-122"/>
+              <a:cs typeface="Aptos" panose="020B0004020202020204" pitchFamily="34" charset="0"/>
+            </a:endParaRPr>
+          </a:p>
+        </p:txBody>
+      </p:sp>
+      <p:sp>
+        <p:nvSpPr>
+          <p:cNvPr id="6" name="Rectangle 5">
+            <a:extLst>
+              <a:ext uri="{FF2B5EF4-FFF2-40B4-BE49-F238E27FC236}">
+                <a16:creationId xmlns:a16="http://schemas.microsoft.com/office/drawing/2014/main" id="{F5B77AF9-4377-6F96-F3F5-1B6844235192}"/>
+              </a:ext>
+            </a:extLst>
+          </p:cNvPr>
+          <p:cNvSpPr/>
+          <p:nvPr/>
+        </p:nvSpPr>
+        <p:spPr>
+          <a:xfrm>
+            <a:off x="824975" y="3272956"/>
+            <a:ext cx="3369610" cy="1192029"/>
+          </a:xfrm>
+          <a:prstGeom prst="rect">
+            <a:avLst/>
+          </a:prstGeom>
+        </p:spPr>
+        <p:style>
+          <a:lnRef idx="2">
+            <a:schemeClr val="dk1">
+              <a:shade val="15000"/>
+            </a:schemeClr>
+          </a:lnRef>
+          <a:fillRef idx="1">
+            <a:schemeClr val="dk1"/>
+          </a:fillRef>
+          <a:effectRef idx="0">
+            <a:schemeClr val="dk1"/>
+          </a:effectRef>
+          <a:fontRef idx="minor">
+            <a:schemeClr val="lt1"/>
+          </a:fontRef>
+        </p:style>
+        <p:txBody>
+          <a:bodyPr rtlCol="0" anchor="ctr"/>
+          <a:lstStyle/>
+          <a:p>
+            <a:r>
+              <a:rPr lang="en-US" sz="1000" dirty="0">
+                <a:latin typeface="Aptos" panose="020B0004020202020204" pitchFamily="34" charset="0"/>
+                <a:ea typeface="DengXian" panose="02010600030101010101" pitchFamily="2" charset="-122"/>
+                <a:cs typeface="Aptos" panose="020B0004020202020204" pitchFamily="34" charset="0"/>
+              </a:rPr>
+              <a:t>import </a:t>
+            </a:r>
+            <a:r>
+              <a:rPr lang="en-US" sz="1000" dirty="0" err="1">
+                <a:latin typeface="Aptos" panose="020B0004020202020204" pitchFamily="34" charset="0"/>
+                <a:ea typeface="DengXian" panose="02010600030101010101" pitchFamily="2" charset="-122"/>
+                <a:cs typeface="Aptos" panose="020B0004020202020204" pitchFamily="34" charset="0"/>
+              </a:rPr>
+              <a:t>org.apache.spark.sql.functions.broadcast</a:t>
+            </a:r>
+            <a:endParaRPr lang="en-US" sz="1000" dirty="0">
+              <a:latin typeface="Aptos" panose="020B0004020202020204" pitchFamily="34" charset="0"/>
+              <a:ea typeface="DengXian" panose="02010600030101010101" pitchFamily="2" charset="-122"/>
+              <a:cs typeface="Aptos" panose="020B0004020202020204" pitchFamily="34" charset="0"/>
+            </a:endParaRPr>
+          </a:p>
+          <a:p>
+            <a:endParaRPr lang="en-US" sz="1000" dirty="0">
+              <a:latin typeface="Aptos" panose="020B0004020202020204" pitchFamily="34" charset="0"/>
+              <a:ea typeface="DengXian" panose="02010600030101010101" pitchFamily="2" charset="-122"/>
+              <a:cs typeface="Aptos" panose="020B0004020202020204" pitchFamily="34" charset="0"/>
+            </a:endParaRPr>
+          </a:p>
+          <a:p>
+            <a:r>
+              <a:rPr lang="en-US" sz="1000" dirty="0" err="1">
+                <a:latin typeface="Aptos" panose="020B0004020202020204" pitchFamily="34" charset="0"/>
+                <a:ea typeface="DengXian" panose="02010600030101010101" pitchFamily="2" charset="-122"/>
+                <a:cs typeface="Aptos" panose="020B0004020202020204" pitchFamily="34" charset="0"/>
+              </a:rPr>
+              <a:t>val</a:t>
+            </a:r>
+            <a:r>
+              <a:rPr lang="en-US" sz="1000" dirty="0">
+                <a:latin typeface="Aptos" panose="020B0004020202020204" pitchFamily="34" charset="0"/>
+                <a:ea typeface="DengXian" panose="02010600030101010101" pitchFamily="2" charset="-122"/>
+                <a:cs typeface="Aptos" panose="020B0004020202020204" pitchFamily="34" charset="0"/>
+              </a:rPr>
+              <a:t> </a:t>
+            </a:r>
+            <a:r>
+              <a:rPr lang="en-US" sz="1000" dirty="0" err="1">
+                <a:latin typeface="Aptos" panose="020B0004020202020204" pitchFamily="34" charset="0"/>
+                <a:ea typeface="DengXian" panose="02010600030101010101" pitchFamily="2" charset="-122"/>
+                <a:cs typeface="Aptos" panose="020B0004020202020204" pitchFamily="34" charset="0"/>
+              </a:rPr>
+              <a:t>resultat</a:t>
+            </a:r>
+            <a:r>
+              <a:rPr lang="en-US" sz="1000" dirty="0">
+                <a:latin typeface="Aptos" panose="020B0004020202020204" pitchFamily="34" charset="0"/>
+                <a:ea typeface="DengXian" panose="02010600030101010101" pitchFamily="2" charset="-122"/>
+                <a:cs typeface="Aptos" panose="020B0004020202020204" pitchFamily="34" charset="0"/>
+              </a:rPr>
+              <a:t> = </a:t>
+            </a:r>
+            <a:r>
+              <a:rPr lang="en-US" sz="1000" dirty="0" err="1">
+                <a:latin typeface="Aptos" panose="020B0004020202020204" pitchFamily="34" charset="0"/>
+                <a:ea typeface="DengXian" panose="02010600030101010101" pitchFamily="2" charset="-122"/>
+                <a:cs typeface="Aptos" panose="020B0004020202020204" pitchFamily="34" charset="0"/>
+              </a:rPr>
+              <a:t>grandeTable</a:t>
+            </a:r>
+            <a:endParaRPr lang="en-US" sz="1000" dirty="0">
+              <a:latin typeface="Aptos" panose="020B0004020202020204" pitchFamily="34" charset="0"/>
+              <a:ea typeface="DengXian" panose="02010600030101010101" pitchFamily="2" charset="-122"/>
+              <a:cs typeface="Aptos" panose="020B0004020202020204" pitchFamily="34" charset="0"/>
+            </a:endParaRPr>
+          </a:p>
+          <a:p>
+            <a:r>
+              <a:rPr lang="en-US" sz="1000" dirty="0">
+                <a:latin typeface="Aptos" panose="020B0004020202020204" pitchFamily="34" charset="0"/>
+                <a:ea typeface="DengXian" panose="02010600030101010101" pitchFamily="2" charset="-122"/>
+                <a:cs typeface="Aptos" panose="020B0004020202020204" pitchFamily="34" charset="0"/>
+              </a:rPr>
+              <a:t>  .join(broadcast(</a:t>
+            </a:r>
+            <a:r>
+              <a:rPr lang="en-US" sz="1000" dirty="0" err="1">
+                <a:latin typeface="Aptos" panose="020B0004020202020204" pitchFamily="34" charset="0"/>
+                <a:ea typeface="DengXian" panose="02010600030101010101" pitchFamily="2" charset="-122"/>
+                <a:cs typeface="Aptos" panose="020B0004020202020204" pitchFamily="34" charset="0"/>
+              </a:rPr>
+              <a:t>petiteTable</a:t>
+            </a:r>
+            <a:r>
+              <a:rPr lang="en-US" sz="1000" dirty="0">
+                <a:latin typeface="Aptos" panose="020B0004020202020204" pitchFamily="34" charset="0"/>
+                <a:ea typeface="DengXian" panose="02010600030101010101" pitchFamily="2" charset="-122"/>
+                <a:cs typeface="Aptos" panose="020B0004020202020204" pitchFamily="34" charset="0"/>
+              </a:rPr>
+              <a:t>), Seq("id"))</a:t>
+            </a:r>
+            <a:endParaRPr lang="fr-FR" sz="1000" dirty="0">
+              <a:latin typeface="Aptos" panose="020B0004020202020204" pitchFamily="34" charset="0"/>
+              <a:ea typeface="DengXian" panose="02010600030101010101" pitchFamily="2" charset="-122"/>
+              <a:cs typeface="Aptos" panose="020B0004020202020204" pitchFamily="34" charset="0"/>
+            </a:endParaRPr>
           </a:p>
         </p:txBody>
       </p:sp>
@@ -38491,6 +38878,30 @@
 </file>
 
 <file path=customXml/item1.xml><?xml version="1.0" encoding="utf-8"?>
+<?mso-contentType ?>
+<FormTemplates xmlns="http://schemas.microsoft.com/sharepoint/v3/contenttype/forms">
+  <Display>DocumentLibraryForm</Display>
+  <Edit>DocumentLibraryForm</Edit>
+  <New>DocumentLibraryForm</New>
+</FormTemplates>
+</file>
+
+<file path=customXml/item2.xml><?xml version="1.0" encoding="utf-8"?>
+<p:properties xmlns:p="http://schemas.microsoft.com/office/2006/metadata/properties" xmlns:xsi="http://www.w3.org/2001/XMLSchema-instance" xmlns:pc="http://schemas.microsoft.com/office/infopath/2007/PartnerControls">
+  <documentManagement>
+    <SharedWithUsers xmlns="73eca01c-4ea5-40c8-83fd-b296bd340025">
+      <UserInfo>
+        <DisplayName>Abir GUENICH - Ingénieure d’affaire</DisplayName>
+        <AccountId>246</AccountId>
+        <AccountType/>
+      </UserInfo>
+    </SharedWithUsers>
+    <_activity xmlns="6f1b3788-58c0-46a5-9604-64d97c7fc47c" xsi:nil="true"/>
+  </documentManagement>
+</p:properties>
+</file>
+
+<file path=customXml/item3.xml><?xml version="1.0" encoding="utf-8"?>
 <ct:contentTypeSchema xmlns:ct="http://schemas.microsoft.com/office/2006/metadata/contentType" xmlns:ma="http://schemas.microsoft.com/office/2006/metadata/properties/metaAttributes" ct:_="" ma:_="" ma:contentTypeName="Document" ma:contentTypeID="0x01010058419B1710D3DF4A9DAA9ADF73C802B5" ma:contentTypeVersion="14" ma:contentTypeDescription="Crée un document." ma:contentTypeScope="" ma:versionID="d45f398bd182fafaec1e6b20d8a38b6f">
   <xsd:schema xmlns:xsd="http://www.w3.org/2001/XMLSchema" xmlns:xs="http://www.w3.org/2001/XMLSchema" xmlns:p="http://schemas.microsoft.com/office/2006/metadata/properties" xmlns:ns3="6f1b3788-58c0-46a5-9604-64d97c7fc47c" xmlns:ns4="73eca01c-4ea5-40c8-83fd-b296bd340025" targetNamespace="http://schemas.microsoft.com/office/2006/metadata/properties" ma:root="true" ma:fieldsID="de746a5257d740f042749d495693305b" ns3:_="" ns4:_="">
     <xsd:import namespace="6f1b3788-58c0-46a5-9604-64d97c7fc47c"/>
@@ -38715,31 +39126,32 @@
 </ct:contentTypeSchema>
 </file>
 
-<file path=customXml/item2.xml><?xml version="1.0" encoding="utf-8"?>
-<?mso-contentType ?>
-<FormTemplates xmlns="http://schemas.microsoft.com/sharepoint/v3/contenttype/forms">
-  <Display>DocumentLibraryForm</Display>
-  <Edit>DocumentLibraryForm</Edit>
-  <New>DocumentLibraryForm</New>
-</FormTemplates>
+<file path=customXml/itemProps1.xml><?xml version="1.0" encoding="utf-8"?>
+<ds:datastoreItem xmlns:ds="http://schemas.openxmlformats.org/officeDocument/2006/customXml" ds:itemID="{EBAA46D8-DF31-4768-AD82-8F485C82E644}">
+  <ds:schemaRefs>
+    <ds:schemaRef ds:uri="http://schemas.microsoft.com/sharepoint/v3/contenttype/forms"/>
+  </ds:schemaRefs>
+</ds:datastoreItem>
 </file>
 
-<file path=customXml/item3.xml><?xml version="1.0" encoding="utf-8"?>
-<p:properties xmlns:p="http://schemas.microsoft.com/office/2006/metadata/properties" xmlns:xsi="http://www.w3.org/2001/XMLSchema-instance" xmlns:pc="http://schemas.microsoft.com/office/infopath/2007/PartnerControls">
-  <documentManagement>
-    <SharedWithUsers xmlns="73eca01c-4ea5-40c8-83fd-b296bd340025">
-      <UserInfo>
-        <DisplayName>Abir GUENICH - Ingénieure d’affaire</DisplayName>
-        <AccountId>246</AccountId>
-        <AccountType/>
-      </UserInfo>
-    </SharedWithUsers>
-    <_activity xmlns="6f1b3788-58c0-46a5-9604-64d97c7fc47c" xsi:nil="true"/>
-  </documentManagement>
-</p:properties>
+<file path=customXml/itemProps2.xml><?xml version="1.0" encoding="utf-8"?>
+<ds:datastoreItem xmlns:ds="http://schemas.openxmlformats.org/officeDocument/2006/customXml" ds:itemID="{40C00205-F11F-4D61-9572-D162BE7CE022}">
+  <ds:schemaRefs>
+    <ds:schemaRef ds:uri="http://schemas.microsoft.com/office/infopath/2007/PartnerControls"/>
+    <ds:schemaRef ds:uri="http://purl.org/dc/terms/"/>
+    <ds:schemaRef ds:uri="http://purl.org/dc/elements/1.1/"/>
+    <ds:schemaRef ds:uri="6f1b3788-58c0-46a5-9604-64d97c7fc47c"/>
+    <ds:schemaRef ds:uri="73eca01c-4ea5-40c8-83fd-b296bd340025"/>
+    <ds:schemaRef ds:uri="http://purl.org/dc/dcmitype/"/>
+    <ds:schemaRef ds:uri="http://schemas.openxmlformats.org/package/2006/metadata/core-properties"/>
+    <ds:schemaRef ds:uri="http://schemas.microsoft.com/office/2006/documentManagement/types"/>
+    <ds:schemaRef ds:uri="http://www.w3.org/XML/1998/namespace"/>
+    <ds:schemaRef ds:uri="http://schemas.microsoft.com/office/2006/metadata/properties"/>
+  </ds:schemaRefs>
+</ds:datastoreItem>
 </file>
 
-<file path=customXml/itemProps1.xml><?xml version="1.0" encoding="utf-8"?>
+<file path=customXml/itemProps3.xml><?xml version="1.0" encoding="utf-8"?>
 <ds:datastoreItem xmlns:ds="http://schemas.openxmlformats.org/officeDocument/2006/customXml" ds:itemID="{13D40C7A-64C6-4B3B-A1B6-9CB64BC75662}">
   <ds:schemaRefs>
     <ds:schemaRef ds:uri="http://schemas.microsoft.com/office/2006/metadata/contentType"/>
@@ -38756,29 +39168,4 @@
     <ds:schemaRef ds:uri="http://schemas.microsoft.com/internal/obd"/>
   </ds:schemaRefs>
 </ds:datastoreItem>
-</file>
-
-<file path=customXml/itemProps2.xml><?xml version="1.0" encoding="utf-8"?>
-<ds:datastoreItem xmlns:ds="http://schemas.openxmlformats.org/officeDocument/2006/customXml" ds:itemID="{EBAA46D8-DF31-4768-AD82-8F485C82E644}">
-  <ds:schemaRefs>
-    <ds:schemaRef ds:uri="http://schemas.microsoft.com/sharepoint/v3/contenttype/forms"/>
-  </ds:schemaRefs>
-</ds:datastoreItem>
-</file>
-
-<file path=customXml/itemProps3.xml><?xml version="1.0" encoding="utf-8"?>
-<ds:datastoreItem xmlns:ds="http://schemas.openxmlformats.org/officeDocument/2006/customXml" ds:itemID="{40C00205-F11F-4D61-9572-D162BE7CE022}">
-  <ds:schemaRefs>
-    <ds:schemaRef ds:uri="http://schemas.microsoft.com/office/infopath/2007/PartnerControls"/>
-    <ds:schemaRef ds:uri="http://purl.org/dc/terms/"/>
-    <ds:schemaRef ds:uri="http://purl.org/dc/elements/1.1/"/>
-    <ds:schemaRef ds:uri="6f1b3788-58c0-46a5-9604-64d97c7fc47c"/>
-    <ds:schemaRef ds:uri="73eca01c-4ea5-40c8-83fd-b296bd340025"/>
-    <ds:schemaRef ds:uri="http://purl.org/dc/dcmitype/"/>
-    <ds:schemaRef ds:uri="http://schemas.openxmlformats.org/package/2006/metadata/core-properties"/>
-    <ds:schemaRef ds:uri="http://schemas.microsoft.com/office/2006/documentManagement/types"/>
-    <ds:schemaRef ds:uri="http://www.w3.org/XML/1998/namespace"/>
-    <ds:schemaRef ds:uri="http://schemas.microsoft.com/office/2006/metadata/properties"/>
-  </ds:schemaRefs>
-</ds:datastoreItem>
 </file>